--- a/templates/intro-block.pptx
+++ b/templates/intro-block.pptx
@@ -3108,11 +3108,16 @@
           <a:bodyPr anchor="ctr"/>
           <a:lstStyle/>
           <a:p>
-            <a:pPr eaLnBrk="1" hangingPunct="1">
+            <a:pPr eaLnBrk="1" hangingPunct="1" algn="l">
               <a:defRPr/>
             </a:pPr>
             <a:r>
-              <a:rPr lang="fr-FR"/>
+              <a:rPr lang="fr-FR" sz="2800" b="1">
+                <a:solidFill>
+                  <a:srgbClr val="000000"/>
+                </a:solidFill>
+                <a:latin typeface="Calibri"/>
+              </a:rPr>
               <a:t>Sommaire</a:t>
             </a:r>
             <a:endParaRPr lang="fr-FR" sz="2800"/>
@@ -3687,7 +3692,7 @@
             <a:avLst/>
           </a:prstGeom>
           <a:solidFill>
-            <a:srgbClr val="FF6600"/>
+            <a:srgbClr val="99CC00"/>
           </a:solidFill>
           <a:ln>
             <a:noFill/>
@@ -3763,6 +3768,30 @@
           </a:p>
         </p:txBody>
       </p:sp>
+      <p:pic>
+        <p:nvPicPr>
+          <p:cNvPr id="54281" name="PIC_Bandeau_Logo" descr="pic-logo.jpeg"/>
+          <p:cNvPicPr>
+            <a:picLocks noChangeAspect="1"/>
+          </p:cNvPicPr>
+          <p:nvPr/>
+        </p:nvPicPr>
+        <p:blipFill>
+          <a:blip r:embed="rId3"/>
+          <a:stretch>
+            <a:fillRect/>
+          </a:stretch>
+        </p:blipFill>
+        <p:spPr>
+          <a:xfrm>
+            <a:off x="11470314" y="20203"/>
+            <a:ext cx="721686" cy="720000"/>
+          </a:xfrm>
+          <a:prstGeom prst="rect">
+            <a:avLst/>
+          </a:prstGeom>
+        </p:spPr>
+      </p:pic>
     </p:spTree>
   </p:cSld>
   <p:clrMapOvr>

--- a/templates/intro-block.pptx
+++ b/templates/intro-block.pptx
@@ -3112,7 +3112,7 @@
               <a:defRPr/>
             </a:pPr>
             <a:r>
-              <a:rPr lang="fr-FR" sz="2800" b="1">
+              <a:rPr lang="fr-FR" sz="2400" b="1">
                 <a:solidFill>
                   <a:srgbClr val="000000"/>
                 </a:solidFill>
@@ -3770,7 +3770,7 @@
       </p:sp>
       <p:pic>
         <p:nvPicPr>
-          <p:cNvPr id="54281" name="PIC_Bandeau_Logo" descr="pic-logo.jpeg"/>
+          <p:cNvPr id="54281" name="PIC_Bandeau_Logo" descr="image.jpg"/>
           <p:cNvPicPr>
             <a:picLocks noChangeAspect="1"/>
           </p:cNvPicPr>
